--- a/deck/MedCite_Pitch.pptx
+++ b/deck/MedCite_Pitch.pptx
@@ -11404,7 +11404,7 @@
                 </a:solidFill>
                 <a:latin typeface="Calibri"/>
               </a:rPr>
-              <a:t>Full Q&amp;A bank: 9 rehearsed answers in PITCH.md §9</a:t>
+              <a:t>Full Q&amp;A bank: 12 rehearsed answers in PITCH.md §9</a:t>
             </a:r>
           </a:p>
         </p:txBody>
